--- a/materialien/Akte7_Generalprobe/1_Praesentation/DD_A7_Generalprobe.pptx
+++ b/materialien/Akte7_Generalprobe/1_Praesentation/DD_A7_Generalprobe.pptx
@@ -8970,7 +8970,7 @@
                           </a:solidFill>
                           <a:latin typeface="Barlow"/>
                         </a:rPr>
-                        <a:t>erweitern / überführen / erstellen</a:t>
+                        <a:t>erweitern / erstellen</a:t>
                       </a:r>
                     </a:p>
                   </a:txBody>
@@ -9601,7 +9601,7 @@
                           </a:solidFill>
                           <a:latin typeface="Barlow"/>
                         </a:rPr>
-                        <a:t>ER erweitern + überführen (eA)</a:t>
+                        <a:t>ER erweitern + Schema erstellen (eA)</a:t>
                       </a:r>
                     </a:p>
                   </a:txBody>
